--- a/presentation/泰卦外贸团队系统.pptx
+++ b/presentation/泰卦外贸团队系统.pptx
@@ -3501,264 +3501,6 @@
         <p:nvPr/>
       </p:nvGrpSpPr>
       <p:grpSpPr/>
-      <p:sp>
-        <p:nvSpPr>
-          <p:cNvPr id="26" name="Rounded Rectangle 25"/>
-          <p:cNvSpPr/>
-          <p:nvPr/>
-        </p:nvSpPr>
-        <p:spPr>
-          <a:xfrm>
-            <a:off x="7351776" y="3803903"/>
-            <a:ext cx="2907792" cy="1664208"/>
-          </a:xfrm>
-          <a:prstGeom prst="roundRect">
-            <a:avLst/>
-          </a:prstGeom>
-          <a:solidFill>
-            <a:srgbClr val="000000"/>
-          </a:solidFill>
-          <a:ln>
-            <a:noFill/>
-          </a:ln>
-        </p:spPr>
-        <p:style>
-          <a:lnRef idx="1">
-            <a:schemeClr val="accent1"/>
-          </a:lnRef>
-          <a:fillRef idx="3">
-            <a:schemeClr val="accent1"/>
-          </a:fillRef>
-          <a:effectRef idx="2">
-            <a:schemeClr val="accent1"/>
-          </a:effectRef>
-          <a:fontRef idx="minor">
-            <a:schemeClr val="lt1"/>
-          </a:fontRef>
-        </p:style>
-        <p:txBody>
-          <a:bodyPr rtlCol="0" anchor="ctr"/>
-          <a:lstStyle/>
-          <a:p>
-            <a:pPr algn="ctr"/>
-          </a:p>
-        </p:txBody>
-      </p:sp>
-      <p:sp>
-        <p:nvSpPr>
-          <p:cNvPr id="22" name="Rounded Rectangle 21"/>
-          <p:cNvSpPr/>
-          <p:nvPr/>
-        </p:nvSpPr>
-        <p:spPr>
-          <a:xfrm>
-            <a:off x="4133087" y="3803903"/>
-            <a:ext cx="2907792" cy="1664208"/>
-          </a:xfrm>
-          <a:prstGeom prst="roundRect">
-            <a:avLst/>
-          </a:prstGeom>
-          <a:solidFill>
-            <a:srgbClr val="000000"/>
-          </a:solidFill>
-          <a:ln>
-            <a:noFill/>
-          </a:ln>
-        </p:spPr>
-        <p:style>
-          <a:lnRef idx="1">
-            <a:schemeClr val="accent1"/>
-          </a:lnRef>
-          <a:fillRef idx="3">
-            <a:schemeClr val="accent1"/>
-          </a:fillRef>
-          <a:effectRef idx="2">
-            <a:schemeClr val="accent1"/>
-          </a:effectRef>
-          <a:fontRef idx="minor">
-            <a:schemeClr val="lt1"/>
-          </a:fontRef>
-        </p:style>
-        <p:txBody>
-          <a:bodyPr rtlCol="0" anchor="ctr"/>
-          <a:lstStyle/>
-          <a:p>
-            <a:pPr algn="ctr"/>
-          </a:p>
-        </p:txBody>
-      </p:sp>
-      <p:sp>
-        <p:nvSpPr>
-          <p:cNvPr id="18" name="Rounded Rectangle 17"/>
-          <p:cNvSpPr/>
-          <p:nvPr/>
-        </p:nvSpPr>
-        <p:spPr>
-          <a:xfrm>
-            <a:off x="914400" y="3803903"/>
-            <a:ext cx="2907792" cy="1664208"/>
-          </a:xfrm>
-          <a:prstGeom prst="roundRect">
-            <a:avLst/>
-          </a:prstGeom>
-          <a:solidFill>
-            <a:srgbClr val="000000"/>
-          </a:solidFill>
-          <a:ln>
-            <a:noFill/>
-          </a:ln>
-        </p:spPr>
-        <p:style>
-          <a:lnRef idx="1">
-            <a:schemeClr val="accent1"/>
-          </a:lnRef>
-          <a:fillRef idx="3">
-            <a:schemeClr val="accent1"/>
-          </a:fillRef>
-          <a:effectRef idx="2">
-            <a:schemeClr val="accent1"/>
-          </a:effectRef>
-          <a:fontRef idx="minor">
-            <a:schemeClr val="lt1"/>
-          </a:fontRef>
-        </p:style>
-        <p:txBody>
-          <a:bodyPr rtlCol="0" anchor="ctr"/>
-          <a:lstStyle/>
-          <a:p>
-            <a:pPr algn="ctr"/>
-          </a:p>
-        </p:txBody>
-      </p:sp>
-      <p:sp>
-        <p:nvSpPr>
-          <p:cNvPr id="14" name="Rounded Rectangle 13"/>
-          <p:cNvSpPr/>
-          <p:nvPr/>
-        </p:nvSpPr>
-        <p:spPr>
-          <a:xfrm>
-            <a:off x="7351776" y="1655064"/>
-            <a:ext cx="2907792" cy="1664208"/>
-          </a:xfrm>
-          <a:prstGeom prst="roundRect">
-            <a:avLst/>
-          </a:prstGeom>
-          <a:solidFill>
-            <a:srgbClr val="000000"/>
-          </a:solidFill>
-          <a:ln>
-            <a:noFill/>
-          </a:ln>
-        </p:spPr>
-        <p:style>
-          <a:lnRef idx="1">
-            <a:schemeClr val="accent1"/>
-          </a:lnRef>
-          <a:fillRef idx="3">
-            <a:schemeClr val="accent1"/>
-          </a:fillRef>
-          <a:effectRef idx="2">
-            <a:schemeClr val="accent1"/>
-          </a:effectRef>
-          <a:fontRef idx="minor">
-            <a:schemeClr val="lt1"/>
-          </a:fontRef>
-        </p:style>
-        <p:txBody>
-          <a:bodyPr rtlCol="0" anchor="ctr"/>
-          <a:lstStyle/>
-          <a:p>
-            <a:pPr algn="ctr"/>
-          </a:p>
-        </p:txBody>
-      </p:sp>
-      <p:sp>
-        <p:nvSpPr>
-          <p:cNvPr id="10" name="Rounded Rectangle 9"/>
-          <p:cNvSpPr/>
-          <p:nvPr/>
-        </p:nvSpPr>
-        <p:spPr>
-          <a:xfrm>
-            <a:off x="4133087" y="1655064"/>
-            <a:ext cx="2907792" cy="1664208"/>
-          </a:xfrm>
-          <a:prstGeom prst="roundRect">
-            <a:avLst/>
-          </a:prstGeom>
-          <a:solidFill>
-            <a:srgbClr val="000000"/>
-          </a:solidFill>
-          <a:ln>
-            <a:noFill/>
-          </a:ln>
-        </p:spPr>
-        <p:style>
-          <a:lnRef idx="1">
-            <a:schemeClr val="accent1"/>
-          </a:lnRef>
-          <a:fillRef idx="3">
-            <a:schemeClr val="accent1"/>
-          </a:fillRef>
-          <a:effectRef idx="2">
-            <a:schemeClr val="accent1"/>
-          </a:effectRef>
-          <a:fontRef idx="minor">
-            <a:schemeClr val="lt1"/>
-          </a:fontRef>
-        </p:style>
-        <p:txBody>
-          <a:bodyPr rtlCol="0" anchor="ctr"/>
-          <a:lstStyle/>
-          <a:p>
-            <a:pPr algn="ctr"/>
-          </a:p>
-        </p:txBody>
-      </p:sp>
-      <p:sp>
-        <p:nvSpPr>
-          <p:cNvPr id="6" name="Rounded Rectangle 5"/>
-          <p:cNvSpPr/>
-          <p:nvPr/>
-        </p:nvSpPr>
-        <p:spPr>
-          <a:xfrm>
-            <a:off x="914400" y="1655064"/>
-            <a:ext cx="2907792" cy="1664208"/>
-          </a:xfrm>
-          <a:prstGeom prst="roundRect">
-            <a:avLst/>
-          </a:prstGeom>
-          <a:solidFill>
-            <a:srgbClr val="000000"/>
-          </a:solidFill>
-          <a:ln>
-            <a:noFill/>
-          </a:ln>
-        </p:spPr>
-        <p:style>
-          <a:lnRef idx="1">
-            <a:schemeClr val="accent1"/>
-          </a:lnRef>
-          <a:fillRef idx="3">
-            <a:schemeClr val="accent1"/>
-          </a:fillRef>
-          <a:effectRef idx="2">
-            <a:schemeClr val="accent1"/>
-          </a:effectRef>
-          <a:fontRef idx="minor">
-            <a:schemeClr val="lt1"/>
-          </a:fontRef>
-        </p:style>
-        <p:txBody>
-          <a:bodyPr rtlCol="0" anchor="ctr"/>
-          <a:lstStyle/>
-          <a:p>
-            <a:pPr algn="ctr"/>
-          </a:p>
-        </p:txBody>
-      </p:sp>
       <p:pic>
         <p:nvPicPr>
           <p:cNvPr id="2" name="Picture 1" descr="tosea_deep_blue_bg.png"/>
@@ -3884,6 +3626,49 @@
         </p:nvSpPr>
         <p:spPr>
           <a:xfrm>
+            <a:off x="914400" y="1655064"/>
+            <a:ext cx="2907792" cy="1664208"/>
+          </a:xfrm>
+          <a:prstGeom prst="roundRect">
+            <a:avLst/>
+          </a:prstGeom>
+          <a:solidFill>
+            <a:srgbClr val="000000"/>
+          </a:solidFill>
+          <a:ln>
+            <a:noFill/>
+          </a:ln>
+        </p:spPr>
+        <p:style>
+          <a:lnRef idx="1">
+            <a:schemeClr val="accent1"/>
+          </a:lnRef>
+          <a:fillRef idx="3">
+            <a:schemeClr val="accent1"/>
+          </a:fillRef>
+          <a:effectRef idx="2">
+            <a:schemeClr val="accent1"/>
+          </a:effectRef>
+          <a:fontRef idx="minor">
+            <a:schemeClr val="lt1"/>
+          </a:fontRef>
+        </p:style>
+        <p:txBody>
+          <a:bodyPr rtlCol="0" anchor="ctr"/>
+          <a:lstStyle/>
+          <a:p>
+            <a:pPr algn="ctr"/>
+          </a:p>
+        </p:txBody>
+      </p:sp>
+      <p:sp>
+        <p:nvSpPr>
+          <p:cNvPr id="6" name="Rounded Rectangle 5"/>
+          <p:cNvSpPr/>
+          <p:nvPr/>
+        </p:nvSpPr>
+        <p:spPr>
+          <a:xfrm>
             <a:off x="868680" y="1600200"/>
             <a:ext cx="2907792" cy="1664208"/>
           </a:xfrm>
@@ -4017,6 +3802,49 @@
         </p:nvSpPr>
         <p:spPr>
           <a:xfrm>
+            <a:off x="4133087" y="1655064"/>
+            <a:ext cx="2907792" cy="1664208"/>
+          </a:xfrm>
+          <a:prstGeom prst="roundRect">
+            <a:avLst/>
+          </a:prstGeom>
+          <a:solidFill>
+            <a:srgbClr val="000000"/>
+          </a:solidFill>
+          <a:ln>
+            <a:noFill/>
+          </a:ln>
+        </p:spPr>
+        <p:style>
+          <a:lnRef idx="1">
+            <a:schemeClr val="accent1"/>
+          </a:lnRef>
+          <a:fillRef idx="3">
+            <a:schemeClr val="accent1"/>
+          </a:fillRef>
+          <a:effectRef idx="2">
+            <a:schemeClr val="accent1"/>
+          </a:effectRef>
+          <a:fontRef idx="minor">
+            <a:schemeClr val="lt1"/>
+          </a:fontRef>
+        </p:style>
+        <p:txBody>
+          <a:bodyPr rtlCol="0" anchor="ctr"/>
+          <a:lstStyle/>
+          <a:p>
+            <a:pPr algn="ctr"/>
+          </a:p>
+        </p:txBody>
+      </p:sp>
+      <p:sp>
+        <p:nvSpPr>
+          <p:cNvPr id="10" name="Rounded Rectangle 9"/>
+          <p:cNvSpPr/>
+          <p:nvPr/>
+        </p:nvSpPr>
+        <p:spPr>
+          <a:xfrm>
             <a:off x="4087368" y="1600200"/>
             <a:ext cx="2907792" cy="1664208"/>
           </a:xfrm>
@@ -4150,6 +3978,49 @@
         </p:nvSpPr>
         <p:spPr>
           <a:xfrm>
+            <a:off x="7351776" y="1655064"/>
+            <a:ext cx="2907792" cy="1664208"/>
+          </a:xfrm>
+          <a:prstGeom prst="roundRect">
+            <a:avLst/>
+          </a:prstGeom>
+          <a:solidFill>
+            <a:srgbClr val="000000"/>
+          </a:solidFill>
+          <a:ln>
+            <a:noFill/>
+          </a:ln>
+        </p:spPr>
+        <p:style>
+          <a:lnRef idx="1">
+            <a:schemeClr val="accent1"/>
+          </a:lnRef>
+          <a:fillRef idx="3">
+            <a:schemeClr val="accent1"/>
+          </a:fillRef>
+          <a:effectRef idx="2">
+            <a:schemeClr val="accent1"/>
+          </a:effectRef>
+          <a:fontRef idx="minor">
+            <a:schemeClr val="lt1"/>
+          </a:fontRef>
+        </p:style>
+        <p:txBody>
+          <a:bodyPr rtlCol="0" anchor="ctr"/>
+          <a:lstStyle/>
+          <a:p>
+            <a:pPr algn="ctr"/>
+          </a:p>
+        </p:txBody>
+      </p:sp>
+      <p:sp>
+        <p:nvSpPr>
+          <p:cNvPr id="14" name="Rounded Rectangle 13"/>
+          <p:cNvSpPr/>
+          <p:nvPr/>
+        </p:nvSpPr>
+        <p:spPr>
+          <a:xfrm>
             <a:off x="7306056" y="1600200"/>
             <a:ext cx="2907792" cy="1664208"/>
           </a:xfrm>
@@ -4283,6 +4154,49 @@
         </p:nvSpPr>
         <p:spPr>
           <a:xfrm>
+            <a:off x="914400" y="3803903"/>
+            <a:ext cx="2907792" cy="1664208"/>
+          </a:xfrm>
+          <a:prstGeom prst="roundRect">
+            <a:avLst/>
+          </a:prstGeom>
+          <a:solidFill>
+            <a:srgbClr val="000000"/>
+          </a:solidFill>
+          <a:ln>
+            <a:noFill/>
+          </a:ln>
+        </p:spPr>
+        <p:style>
+          <a:lnRef idx="1">
+            <a:schemeClr val="accent1"/>
+          </a:lnRef>
+          <a:fillRef idx="3">
+            <a:schemeClr val="accent1"/>
+          </a:fillRef>
+          <a:effectRef idx="2">
+            <a:schemeClr val="accent1"/>
+          </a:effectRef>
+          <a:fontRef idx="minor">
+            <a:schemeClr val="lt1"/>
+          </a:fontRef>
+        </p:style>
+        <p:txBody>
+          <a:bodyPr rtlCol="0" anchor="ctr"/>
+          <a:lstStyle/>
+          <a:p>
+            <a:pPr algn="ctr"/>
+          </a:p>
+        </p:txBody>
+      </p:sp>
+      <p:sp>
+        <p:nvSpPr>
+          <p:cNvPr id="18" name="Rounded Rectangle 17"/>
+          <p:cNvSpPr/>
+          <p:nvPr/>
+        </p:nvSpPr>
+        <p:spPr>
+          <a:xfrm>
             <a:off x="868680" y="3749039"/>
             <a:ext cx="2907792" cy="1664208"/>
           </a:xfrm>
@@ -4416,6 +4330,49 @@
         </p:nvSpPr>
         <p:spPr>
           <a:xfrm>
+            <a:off x="4133087" y="3803903"/>
+            <a:ext cx="2907792" cy="1664208"/>
+          </a:xfrm>
+          <a:prstGeom prst="roundRect">
+            <a:avLst/>
+          </a:prstGeom>
+          <a:solidFill>
+            <a:srgbClr val="000000"/>
+          </a:solidFill>
+          <a:ln>
+            <a:noFill/>
+          </a:ln>
+        </p:spPr>
+        <p:style>
+          <a:lnRef idx="1">
+            <a:schemeClr val="accent1"/>
+          </a:lnRef>
+          <a:fillRef idx="3">
+            <a:schemeClr val="accent1"/>
+          </a:fillRef>
+          <a:effectRef idx="2">
+            <a:schemeClr val="accent1"/>
+          </a:effectRef>
+          <a:fontRef idx="minor">
+            <a:schemeClr val="lt1"/>
+          </a:fontRef>
+        </p:style>
+        <p:txBody>
+          <a:bodyPr rtlCol="0" anchor="ctr"/>
+          <a:lstStyle/>
+          <a:p>
+            <a:pPr algn="ctr"/>
+          </a:p>
+        </p:txBody>
+      </p:sp>
+      <p:sp>
+        <p:nvSpPr>
+          <p:cNvPr id="22" name="Rounded Rectangle 21"/>
+          <p:cNvSpPr/>
+          <p:nvPr/>
+        </p:nvSpPr>
+        <p:spPr>
+          <a:xfrm>
             <a:off x="4087368" y="3749039"/>
             <a:ext cx="2907792" cy="1664208"/>
           </a:xfrm>
@@ -4544,6 +4501,49 @@
       <p:sp>
         <p:nvSpPr>
           <p:cNvPr id="25" name="Rounded Rectangle 24"/>
+          <p:cNvSpPr/>
+          <p:nvPr/>
+        </p:nvSpPr>
+        <p:spPr>
+          <a:xfrm>
+            <a:off x="7351776" y="3803903"/>
+            <a:ext cx="2907792" cy="1664208"/>
+          </a:xfrm>
+          <a:prstGeom prst="roundRect">
+            <a:avLst/>
+          </a:prstGeom>
+          <a:solidFill>
+            <a:srgbClr val="000000"/>
+          </a:solidFill>
+          <a:ln>
+            <a:noFill/>
+          </a:ln>
+        </p:spPr>
+        <p:style>
+          <a:lnRef idx="1">
+            <a:schemeClr val="accent1"/>
+          </a:lnRef>
+          <a:fillRef idx="3">
+            <a:schemeClr val="accent1"/>
+          </a:fillRef>
+          <a:effectRef idx="2">
+            <a:schemeClr val="accent1"/>
+          </a:effectRef>
+          <a:fontRef idx="minor">
+            <a:schemeClr val="lt1"/>
+          </a:fontRef>
+        </p:style>
+        <p:txBody>
+          <a:bodyPr rtlCol="0" anchor="ctr"/>
+          <a:lstStyle/>
+          <a:p>
+            <a:pPr algn="ctr"/>
+          </a:p>
+        </p:txBody>
+      </p:sp>
+      <p:sp>
+        <p:nvSpPr>
+          <p:cNvPr id="26" name="Rounded Rectangle 25"/>
           <p:cNvSpPr/>
           <p:nvPr/>
         </p:nvSpPr>
@@ -4727,49 +4727,6 @@
         <p:nvPr/>
       </p:nvGrpSpPr>
       <p:grpSpPr/>
-      <p:sp>
-        <p:nvSpPr>
-          <p:cNvPr id="18" name="Rounded Rectangle 17"/>
-          <p:cNvSpPr/>
-          <p:nvPr/>
-        </p:nvSpPr>
-        <p:spPr>
-          <a:xfrm>
-            <a:off x="7589520" y="1682496"/>
-            <a:ext cx="3749039" cy="3246120"/>
-          </a:xfrm>
-          <a:prstGeom prst="roundRect">
-            <a:avLst/>
-          </a:prstGeom>
-          <a:solidFill>
-            <a:srgbClr val="000000"/>
-          </a:solidFill>
-          <a:ln>
-            <a:noFill/>
-          </a:ln>
-        </p:spPr>
-        <p:style>
-          <a:lnRef idx="1">
-            <a:schemeClr val="accent1"/>
-          </a:lnRef>
-          <a:fillRef idx="3">
-            <a:schemeClr val="accent1"/>
-          </a:fillRef>
-          <a:effectRef idx="2">
-            <a:schemeClr val="accent1"/>
-          </a:effectRef>
-          <a:fontRef idx="minor">
-            <a:schemeClr val="lt1"/>
-          </a:fontRef>
-        </p:style>
-        <p:txBody>
-          <a:bodyPr rtlCol="0" anchor="ctr"/>
-          <a:lstStyle/>
-          <a:p>
-            <a:pPr algn="ctr"/>
-          </a:p>
-        </p:txBody>
-      </p:sp>
       <p:pic>
         <p:nvPicPr>
           <p:cNvPr id="2" name="Picture 1" descr="tosea_deep_blue_bg.png"/>
@@ -5441,6 +5398,49 @@
       <p:sp>
         <p:nvSpPr>
           <p:cNvPr id="17" name="Rounded Rectangle 16"/>
+          <p:cNvSpPr/>
+          <p:nvPr/>
+        </p:nvSpPr>
+        <p:spPr>
+          <a:xfrm>
+            <a:off x="7589520" y="1682496"/>
+            <a:ext cx="3749039" cy="3246120"/>
+          </a:xfrm>
+          <a:prstGeom prst="roundRect">
+            <a:avLst/>
+          </a:prstGeom>
+          <a:solidFill>
+            <a:srgbClr val="000000"/>
+          </a:solidFill>
+          <a:ln>
+            <a:noFill/>
+          </a:ln>
+        </p:spPr>
+        <p:style>
+          <a:lnRef idx="1">
+            <a:schemeClr val="accent1"/>
+          </a:lnRef>
+          <a:fillRef idx="3">
+            <a:schemeClr val="accent1"/>
+          </a:fillRef>
+          <a:effectRef idx="2">
+            <a:schemeClr val="accent1"/>
+          </a:effectRef>
+          <a:fontRef idx="minor">
+            <a:schemeClr val="lt1"/>
+          </a:fontRef>
+        </p:style>
+        <p:txBody>
+          <a:bodyPr rtlCol="0" anchor="ctr"/>
+          <a:lstStyle/>
+          <a:p>
+            <a:pPr algn="ctr"/>
+          </a:p>
+        </p:txBody>
+      </p:sp>
+      <p:sp>
+        <p:nvSpPr>
+          <p:cNvPr id="18" name="Rounded Rectangle 17"/>
           <p:cNvSpPr/>
           <p:nvPr/>
         </p:nvSpPr>
@@ -5708,49 +5708,6 @@
         <p:nvPr/>
       </p:nvGrpSpPr>
       <p:grpSpPr/>
-      <p:sp>
-        <p:nvSpPr>
-          <p:cNvPr id="23" name="Rounded Rectangle 22"/>
-          <p:cNvSpPr/>
-          <p:nvPr/>
-        </p:nvSpPr>
-        <p:spPr>
-          <a:xfrm>
-            <a:off x="941832" y="5705855"/>
-            <a:ext cx="10378440" cy="658368"/>
-          </a:xfrm>
-          <a:prstGeom prst="roundRect">
-            <a:avLst/>
-          </a:prstGeom>
-          <a:solidFill>
-            <a:srgbClr val="000000"/>
-          </a:solidFill>
-          <a:ln>
-            <a:noFill/>
-          </a:ln>
-        </p:spPr>
-        <p:style>
-          <a:lnRef idx="1">
-            <a:schemeClr val="accent1"/>
-          </a:lnRef>
-          <a:fillRef idx="3">
-            <a:schemeClr val="accent1"/>
-          </a:fillRef>
-          <a:effectRef idx="2">
-            <a:schemeClr val="accent1"/>
-          </a:effectRef>
-          <a:fontRef idx="minor">
-            <a:schemeClr val="lt1"/>
-          </a:fontRef>
-        </p:style>
-        <p:txBody>
-          <a:bodyPr rtlCol="0" anchor="ctr"/>
-          <a:lstStyle/>
-          <a:p>
-            <a:pPr algn="ctr"/>
-          </a:p>
-        </p:txBody>
-      </p:sp>
       <p:pic>
         <p:nvPicPr>
           <p:cNvPr id="2" name="Picture 1" descr="tosea_deep_blue_bg.png"/>
@@ -6555,6 +6512,49 @@
       <p:sp>
         <p:nvSpPr>
           <p:cNvPr id="22" name="Rounded Rectangle 21"/>
+          <p:cNvSpPr/>
+          <p:nvPr/>
+        </p:nvSpPr>
+        <p:spPr>
+          <a:xfrm>
+            <a:off x="941832" y="5705855"/>
+            <a:ext cx="10378440" cy="658368"/>
+          </a:xfrm>
+          <a:prstGeom prst="roundRect">
+            <a:avLst/>
+          </a:prstGeom>
+          <a:solidFill>
+            <a:srgbClr val="000000"/>
+          </a:solidFill>
+          <a:ln>
+            <a:noFill/>
+          </a:ln>
+        </p:spPr>
+        <p:style>
+          <a:lnRef idx="1">
+            <a:schemeClr val="accent1"/>
+          </a:lnRef>
+          <a:fillRef idx="3">
+            <a:schemeClr val="accent1"/>
+          </a:fillRef>
+          <a:effectRef idx="2">
+            <a:schemeClr val="accent1"/>
+          </a:effectRef>
+          <a:fontRef idx="minor">
+            <a:schemeClr val="lt1"/>
+          </a:fontRef>
+        </p:style>
+        <p:txBody>
+          <a:bodyPr rtlCol="0" anchor="ctr"/>
+          <a:lstStyle/>
+          <a:p>
+            <a:pPr algn="ctr"/>
+          </a:p>
+        </p:txBody>
+      </p:sp>
+      <p:sp>
+        <p:nvSpPr>
+          <p:cNvPr id="23" name="Rounded Rectangle 22"/>
           <p:cNvSpPr/>
           <p:nvPr/>
         </p:nvSpPr>
@@ -7593,49 +7593,6 @@
         <p:nvPr/>
       </p:nvGrpSpPr>
       <p:grpSpPr/>
-      <p:sp>
-        <p:nvSpPr>
-          <p:cNvPr id="27" name="Rounded Rectangle 26"/>
-          <p:cNvSpPr/>
-          <p:nvPr/>
-        </p:nvSpPr>
-        <p:spPr>
-          <a:xfrm>
-            <a:off x="1051560" y="4123944"/>
-            <a:ext cx="10012680" cy="1234440"/>
-          </a:xfrm>
-          <a:prstGeom prst="roundRect">
-            <a:avLst/>
-          </a:prstGeom>
-          <a:solidFill>
-            <a:srgbClr val="000000"/>
-          </a:solidFill>
-          <a:ln>
-            <a:noFill/>
-          </a:ln>
-        </p:spPr>
-        <p:style>
-          <a:lnRef idx="1">
-            <a:schemeClr val="accent1"/>
-          </a:lnRef>
-          <a:fillRef idx="3">
-            <a:schemeClr val="accent1"/>
-          </a:fillRef>
-          <a:effectRef idx="2">
-            <a:schemeClr val="accent1"/>
-          </a:effectRef>
-          <a:fontRef idx="minor">
-            <a:schemeClr val="lt1"/>
-          </a:fontRef>
-        </p:style>
-        <p:txBody>
-          <a:bodyPr rtlCol="0" anchor="ctr"/>
-          <a:lstStyle/>
-          <a:p>
-            <a:pPr algn="ctr"/>
-          </a:p>
-        </p:txBody>
-      </p:sp>
       <p:pic>
         <p:nvPicPr>
           <p:cNvPr id="2" name="Picture 1" descr="tosea_deep_blue_bg.png"/>
@@ -8760,6 +8717,49 @@
       <p:sp>
         <p:nvSpPr>
           <p:cNvPr id="26" name="Rounded Rectangle 25"/>
+          <p:cNvSpPr/>
+          <p:nvPr/>
+        </p:nvSpPr>
+        <p:spPr>
+          <a:xfrm>
+            <a:off x="1051560" y="4123944"/>
+            <a:ext cx="10012680" cy="1234440"/>
+          </a:xfrm>
+          <a:prstGeom prst="roundRect">
+            <a:avLst/>
+          </a:prstGeom>
+          <a:solidFill>
+            <a:srgbClr val="000000"/>
+          </a:solidFill>
+          <a:ln>
+            <a:noFill/>
+          </a:ln>
+        </p:spPr>
+        <p:style>
+          <a:lnRef idx="1">
+            <a:schemeClr val="accent1"/>
+          </a:lnRef>
+          <a:fillRef idx="3">
+            <a:schemeClr val="accent1"/>
+          </a:fillRef>
+          <a:effectRef idx="2">
+            <a:schemeClr val="accent1"/>
+          </a:effectRef>
+          <a:fontRef idx="minor">
+            <a:schemeClr val="lt1"/>
+          </a:fontRef>
+        </p:style>
+        <p:txBody>
+          <a:bodyPr rtlCol="0" anchor="ctr"/>
+          <a:lstStyle/>
+          <a:p>
+            <a:pPr algn="ctr"/>
+          </a:p>
+        </p:txBody>
+      </p:sp>
+      <p:sp>
+        <p:nvSpPr>
+          <p:cNvPr id="27" name="Rounded Rectangle 26"/>
           <p:cNvSpPr/>
           <p:nvPr/>
         </p:nvSpPr>
@@ -9663,92 +9663,6 @@
         <p:nvPr/>
       </p:nvGrpSpPr>
       <p:grpSpPr/>
-      <p:sp>
-        <p:nvSpPr>
-          <p:cNvPr id="11" name="Rounded Rectangle 10"/>
-          <p:cNvSpPr/>
-          <p:nvPr/>
-        </p:nvSpPr>
-        <p:spPr>
-          <a:xfrm>
-            <a:off x="6473952" y="1700784"/>
-            <a:ext cx="4846320" cy="4206240"/>
-          </a:xfrm>
-          <a:prstGeom prst="roundRect">
-            <a:avLst/>
-          </a:prstGeom>
-          <a:solidFill>
-            <a:srgbClr val="000000"/>
-          </a:solidFill>
-          <a:ln>
-            <a:noFill/>
-          </a:ln>
-        </p:spPr>
-        <p:style>
-          <a:lnRef idx="1">
-            <a:schemeClr val="accent1"/>
-          </a:lnRef>
-          <a:fillRef idx="3">
-            <a:schemeClr val="accent1"/>
-          </a:fillRef>
-          <a:effectRef idx="2">
-            <a:schemeClr val="accent1"/>
-          </a:effectRef>
-          <a:fontRef idx="minor">
-            <a:schemeClr val="lt1"/>
-          </a:fontRef>
-        </p:style>
-        <p:txBody>
-          <a:bodyPr rtlCol="0" anchor="ctr"/>
-          <a:lstStyle/>
-          <a:p>
-            <a:pPr algn="ctr"/>
-          </a:p>
-        </p:txBody>
-      </p:sp>
-      <p:sp>
-        <p:nvSpPr>
-          <p:cNvPr id="7" name="Rounded Rectangle 6"/>
-          <p:cNvSpPr/>
-          <p:nvPr/>
-        </p:nvSpPr>
-        <p:spPr>
-          <a:xfrm>
-            <a:off x="941832" y="1700784"/>
-            <a:ext cx="4846320" cy="4206240"/>
-          </a:xfrm>
-          <a:prstGeom prst="roundRect">
-            <a:avLst/>
-          </a:prstGeom>
-          <a:solidFill>
-            <a:srgbClr val="000000"/>
-          </a:solidFill>
-          <a:ln>
-            <a:noFill/>
-          </a:ln>
-        </p:spPr>
-        <p:style>
-          <a:lnRef idx="1">
-            <a:schemeClr val="accent1"/>
-          </a:lnRef>
-          <a:fillRef idx="3">
-            <a:schemeClr val="accent1"/>
-          </a:fillRef>
-          <a:effectRef idx="2">
-            <a:schemeClr val="accent1"/>
-          </a:effectRef>
-          <a:fontRef idx="minor">
-            <a:schemeClr val="lt1"/>
-          </a:fontRef>
-        </p:style>
-        <p:txBody>
-          <a:bodyPr rtlCol="0" anchor="ctr"/>
-          <a:lstStyle/>
-          <a:p>
-            <a:pPr algn="ctr"/>
-          </a:p>
-        </p:txBody>
-      </p:sp>
       <p:pic>
         <p:nvPicPr>
           <p:cNvPr id="2" name="Picture 1" descr="tosea_deep_blue_bg.png"/>
@@ -9926,6 +9840,49 @@
         </p:nvSpPr>
         <p:spPr>
           <a:xfrm>
+            <a:off x="941832" y="1700784"/>
+            <a:ext cx="4846320" cy="4206240"/>
+          </a:xfrm>
+          <a:prstGeom prst="roundRect">
+            <a:avLst/>
+          </a:prstGeom>
+          <a:solidFill>
+            <a:srgbClr val="000000"/>
+          </a:solidFill>
+          <a:ln>
+            <a:noFill/>
+          </a:ln>
+        </p:spPr>
+        <p:style>
+          <a:lnRef idx="1">
+            <a:schemeClr val="accent1"/>
+          </a:lnRef>
+          <a:fillRef idx="3">
+            <a:schemeClr val="accent1"/>
+          </a:fillRef>
+          <a:effectRef idx="2">
+            <a:schemeClr val="accent1"/>
+          </a:effectRef>
+          <a:fontRef idx="minor">
+            <a:schemeClr val="lt1"/>
+          </a:fontRef>
+        </p:style>
+        <p:txBody>
+          <a:bodyPr rtlCol="0" anchor="ctr"/>
+          <a:lstStyle/>
+          <a:p>
+            <a:pPr algn="ctr"/>
+          </a:p>
+        </p:txBody>
+      </p:sp>
+      <p:sp>
+        <p:nvSpPr>
+          <p:cNvPr id="7" name="Rounded Rectangle 6"/>
+          <p:cNvSpPr/>
+          <p:nvPr/>
+        </p:nvSpPr>
+        <p:spPr>
+          <a:xfrm>
             <a:off x="896112" y="1645920"/>
             <a:ext cx="4846320" cy="4206240"/>
           </a:xfrm>
@@ -10069,6 +10026,49 @@
       <p:sp>
         <p:nvSpPr>
           <p:cNvPr id="10" name="Rounded Rectangle 9"/>
+          <p:cNvSpPr/>
+          <p:nvPr/>
+        </p:nvSpPr>
+        <p:spPr>
+          <a:xfrm>
+            <a:off x="6473952" y="1700784"/>
+            <a:ext cx="4846320" cy="4206240"/>
+          </a:xfrm>
+          <a:prstGeom prst="roundRect">
+            <a:avLst/>
+          </a:prstGeom>
+          <a:solidFill>
+            <a:srgbClr val="000000"/>
+          </a:solidFill>
+          <a:ln>
+            <a:noFill/>
+          </a:ln>
+        </p:spPr>
+        <p:style>
+          <a:lnRef idx="1">
+            <a:schemeClr val="accent1"/>
+          </a:lnRef>
+          <a:fillRef idx="3">
+            <a:schemeClr val="accent1"/>
+          </a:fillRef>
+          <a:effectRef idx="2">
+            <a:schemeClr val="accent1"/>
+          </a:effectRef>
+          <a:fontRef idx="minor">
+            <a:schemeClr val="lt1"/>
+          </a:fontRef>
+        </p:style>
+        <p:txBody>
+          <a:bodyPr rtlCol="0" anchor="ctr"/>
+          <a:lstStyle/>
+          <a:p>
+            <a:pPr algn="ctr"/>
+          </a:p>
+        </p:txBody>
+      </p:sp>
+      <p:sp>
+        <p:nvSpPr>
+          <p:cNvPr id="11" name="Rounded Rectangle 10"/>
           <p:cNvSpPr/>
           <p:nvPr/>
         </p:nvSpPr>

--- a/presentation/泰卦外贸团队系统.pptx
+++ b/presentation/泰卦外贸团队系统.pptx
@@ -4938,7 +4938,7 @@
           <a:lstStyle/>
           <a:p>
             <a:pPr algn="ctr">
-              <a:defRPr b="1" sz="1400">
+              <a:defRPr sz="1400" b="1">
                 <a:solidFill>
                   <a:srgbClr val="FFFFFF"/>
                 </a:solidFill>
@@ -4992,7 +4992,7 @@
           <a:lstStyle/>
           <a:p>
             <a:pPr algn="ctr">
-              <a:defRPr b="1" sz="1400">
+              <a:defRPr sz="1400" b="1">
                 <a:solidFill>
                   <a:srgbClr val="FFFFFF"/>
                 </a:solidFill>
@@ -5046,7 +5046,7 @@
           <a:lstStyle/>
           <a:p>
             <a:pPr algn="ctr">
-              <a:defRPr b="1" sz="1400">
+              <a:defRPr sz="1400" b="1">
                 <a:solidFill>
                   <a:srgbClr val="FFFFFF"/>
                 </a:solidFill>
@@ -5100,7 +5100,7 @@
           <a:lstStyle/>
           <a:p>
             <a:pPr algn="ctr">
-              <a:defRPr b="1" sz="1400">
+              <a:defRPr sz="1400" b="1">
                 <a:solidFill>
                   <a:srgbClr val="FFFFFF"/>
                 </a:solidFill>
@@ -5154,7 +5154,7 @@
           <a:lstStyle/>
           <a:p>
             <a:pPr algn="ctr">
-              <a:defRPr b="1" sz="1400">
+              <a:defRPr sz="1400" b="1">
                 <a:solidFill>
                   <a:srgbClr val="FFFFFF"/>
                 </a:solidFill>
@@ -5208,7 +5208,7 @@
           <a:lstStyle/>
           <a:p>
             <a:pPr algn="ctr">
-              <a:defRPr b="1" sz="1400">
+              <a:defRPr sz="1400" b="1">
                 <a:solidFill>
                   <a:srgbClr val="FFFFFF"/>
                 </a:solidFill>
@@ -6934,7 +6934,7 @@
           <a:lstStyle/>
           <a:p>
             <a:pPr algn="ctr">
-              <a:defRPr b="1" sz="1400">
+              <a:defRPr sz="1400" b="1">
                 <a:solidFill>
                   <a:srgbClr val="FFFFFF"/>
                 </a:solidFill>
@@ -6988,7 +6988,7 @@
           <a:lstStyle/>
           <a:p>
             <a:pPr algn="ctr">
-              <a:defRPr b="1" sz="1400">
+              <a:defRPr sz="1400" b="1">
                 <a:solidFill>
                   <a:srgbClr val="FFFFFF"/>
                 </a:solidFill>
@@ -9586,7 +9586,7 @@
           <a:lstStyle/>
           <a:p>
             <a:pPr algn="ctr">
-              <a:defRPr b="1" sz="1600">
+              <a:defRPr sz="1600" b="1">
                 <a:solidFill>
                   <a:srgbClr val="FFFFFF"/>
                 </a:solidFill>
@@ -9595,15 +9595,7 @@
             <a:r>
               <a:t>业务增长闭环</a:t>
             </a:r>
-          </a:p>
-          <a:p>
-            <a:pPr algn="ctr">
-              <a:defRPr b="1" sz="1600">
-                <a:solidFill>
-                  <a:srgbClr val="FFFFFF"/>
-                </a:solidFill>
-              </a:defRPr>
-            </a:pPr>
+            <a:br/>
             <a:r>
               <a:t>标准化推进</a:t>
             </a:r>
